--- a/media/resources/files/Onduktar_Sandardy_iReettoo_Jenil_Orto_Oor.pptx
+++ b/media/resources/files/Onduktar_Sandardy_iReettoo_Jenil_Orto_Oor.pptx
@@ -1809,7 +1809,7 @@
             <a:pPr algn="ctr"/>
             <a:r>
               <a:rPr lang="en-GB" sz="2000" dirty="0"/>
-              <a:t>0.3</a:t>
+              <a:t>0,3</a:t>
             </a:r>
           </a:p>
         </p:txBody>
@@ -1882,7 +1882,7 @@
             <a:pPr algn="ctr"/>
             <a:r>
               <a:rPr lang="en-GB" sz="2000" dirty="0"/>
-              <a:t>0.03</a:t>
+              <a:t>0,03</a:t>
             </a:r>
           </a:p>
         </p:txBody>
@@ -1995,7 +1995,7 @@
             <a:pPr algn="ctr"/>
             <a:r>
               <a:rPr lang="en-GB" sz="2000" dirty="0"/>
-              <a:t>0.38</a:t>
+              <a:t>0,38</a:t>
             </a:r>
           </a:p>
         </p:txBody>
@@ -2068,7 +2068,7 @@
             <a:pPr algn="ctr"/>
             <a:r>
               <a:rPr lang="en-GB" sz="2000" dirty="0"/>
-              <a:t>0.42</a:t>
+              <a:t>0,42</a:t>
             </a:r>
           </a:p>
         </p:txBody>
@@ -2181,7 +2181,7 @@
             <a:pPr algn="ctr"/>
             <a:r>
               <a:rPr lang="en-GB" sz="2000" dirty="0"/>
-              <a:t>0.2</a:t>
+              <a:t>0,2</a:t>
             </a:r>
           </a:p>
         </p:txBody>
@@ -2254,7 +2254,7 @@
             <a:pPr algn="ctr"/>
             <a:r>
               <a:rPr lang="en-GB" sz="2000" dirty="0"/>
-              <a:t>0.18</a:t>
+              <a:t>0,18</a:t>
             </a:r>
           </a:p>
         </p:txBody>
@@ -2367,7 +2367,7 @@
             <a:pPr algn="ctr"/>
             <a:r>
               <a:rPr lang="en-GB" sz="2000" dirty="0"/>
-              <a:t>0.658</a:t>
+              <a:t>0,658</a:t>
             </a:r>
           </a:p>
         </p:txBody>
@@ -2440,7 +2440,7 @@
             <a:pPr algn="ctr"/>
             <a:r>
               <a:rPr lang="en-GB" sz="2000" dirty="0"/>
-              <a:t>0.65</a:t>
+              <a:t>0,65</a:t>
             </a:r>
           </a:p>
         </p:txBody>
@@ -2566,7 +2566,7 @@
             <a:pPr algn="ctr"/>
             <a:r>
               <a:rPr lang="en-GB" sz="2000" dirty="0"/>
-              <a:t>0.34</a:t>
+              <a:t>0,34</a:t>
             </a:r>
           </a:p>
         </p:txBody>
@@ -2605,7 +2605,7 @@
             <a:pPr algn="ctr"/>
             <a:r>
               <a:rPr lang="en-GB" sz="2000" dirty="0"/>
-              <a:t>0.4</a:t>
+              <a:t>0,4</a:t>
             </a:r>
           </a:p>
         </p:txBody>
@@ -2644,7 +2644,7 @@
             <a:pPr algn="ctr"/>
             <a:r>
               <a:rPr lang="en-GB" sz="2000" dirty="0"/>
-              <a:t>0.41</a:t>
+              <a:t>0,41</a:t>
             </a:r>
           </a:p>
         </p:txBody>
@@ -2683,7 +2683,7 @@
             <a:pPr algn="ctr"/>
             <a:r>
               <a:rPr lang="en-GB" sz="2000" dirty="0"/>
-              <a:t>0.403</a:t>
+              <a:t>0,403</a:t>
             </a:r>
           </a:p>
         </p:txBody>
@@ -2805,7 +2805,7 @@
             <a:pPr algn="ctr"/>
             <a:r>
               <a:rPr lang="en-GB" sz="2000" dirty="0"/>
-              <a:t>0.23</a:t>
+              <a:t>0,23</a:t>
             </a:r>
           </a:p>
         </p:txBody>
@@ -2841,7 +2841,7 @@
             <a:pPr algn="ctr"/>
             <a:r>
               <a:rPr lang="en-GB" sz="2000" dirty="0"/>
-              <a:t>0.3</a:t>
+              <a:t>0,3</a:t>
             </a:r>
           </a:p>
         </p:txBody>
@@ -2877,7 +2877,7 @@
             <a:pPr algn="ctr"/>
             <a:r>
               <a:rPr lang="en-GB" sz="2000" dirty="0"/>
-              <a:t>0.203</a:t>
+              <a:t>0,203</a:t>
             </a:r>
           </a:p>
         </p:txBody>
@@ -2999,7 +2999,7 @@
             <a:pPr algn="ctr"/>
             <a:r>
               <a:rPr lang="en-GB" sz="2000" dirty="0"/>
-              <a:t>0.506</a:t>
+              <a:t>0,506</a:t>
             </a:r>
           </a:p>
         </p:txBody>
@@ -3035,7 +3035,7 @@
             <a:pPr algn="ctr"/>
             <a:r>
               <a:rPr lang="en-GB" sz="2000" dirty="0"/>
-              <a:t>0.65</a:t>
+              <a:t>0,65</a:t>
             </a:r>
           </a:p>
         </p:txBody>
@@ -3071,7 +3071,7 @@
             <a:pPr algn="ctr"/>
             <a:r>
               <a:rPr lang="en-GB" sz="2000" dirty="0"/>
-              <a:t>0.56</a:t>
+              <a:t>0,56</a:t>
             </a:r>
           </a:p>
         </p:txBody>
@@ -3107,7 +3107,7 @@
             <a:pPr algn="ctr"/>
             <a:r>
               <a:rPr lang="en-GB" sz="2000" dirty="0"/>
-              <a:t>0.32</a:t>
+              <a:t>0,32</a:t>
             </a:r>
           </a:p>
         </p:txBody>
@@ -3277,7 +3277,7 @@
             <a:pPr algn="ctr"/>
             <a:r>
               <a:rPr lang="en-GB" sz="2000" dirty="0"/>
-              <a:t>0.5 </a:t>
+              <a:t>0,5 </a:t>
             </a:r>
             <a:r>
               <a:rPr lang="ky-KG" sz="2000" dirty="0"/>
@@ -3318,7 +3318,7 @@
             <a:pPr algn="ctr"/>
             <a:r>
               <a:rPr lang="en-GB" sz="2000" dirty="0"/>
-              <a:t>4.5 </a:t>
+              <a:t>4,5 </a:t>
             </a:r>
             <a:r>
               <a:rPr lang="ky-KG" sz="2000" dirty="0"/>
@@ -3359,7 +3359,7 @@
             <a:pPr algn="ctr"/>
             <a:r>
               <a:rPr lang="en-GB" sz="2000" dirty="0"/>
-              <a:t>5.45 </a:t>
+              <a:t>5,45 </a:t>
             </a:r>
             <a:r>
               <a:rPr lang="ky-KG" sz="2000" dirty="0"/>
@@ -3400,7 +3400,7 @@
             <a:pPr algn="ctr"/>
             <a:r>
               <a:rPr lang="en-GB" sz="2000" dirty="0"/>
-              <a:t>0.54 </a:t>
+              <a:t>0,54 </a:t>
             </a:r>
             <a:r>
               <a:rPr lang="ky-KG" sz="2000" dirty="0"/>
@@ -3441,7 +3441,7 @@
             <a:pPr algn="ctr"/>
             <a:r>
               <a:rPr lang="en-GB" sz="2000" dirty="0"/>
-              <a:t>0.454 </a:t>
+              <a:t>0,454 </a:t>
             </a:r>
             <a:r>
               <a:rPr lang="ky-KG" sz="2000" dirty="0"/>
@@ -3622,7 +3622,7 @@
             <a:pPr algn="ctr"/>
             <a:r>
               <a:rPr lang="en-GB" sz="2000" dirty="0"/>
-              <a:t>0.87</a:t>
+              <a:t>0,87</a:t>
             </a:r>
           </a:p>
         </p:txBody>
@@ -3661,7 +3661,7 @@
             <a:pPr algn="ctr"/>
             <a:r>
               <a:rPr lang="en-GB" sz="2000" dirty="0"/>
-              <a:t>0.807</a:t>
+              <a:t>0,807</a:t>
             </a:r>
           </a:p>
         </p:txBody>
@@ -3700,7 +3700,7 @@
             <a:pPr algn="ctr"/>
             <a:r>
               <a:rPr lang="en-GB" sz="2000" dirty="0"/>
-              <a:t>0.78</a:t>
+              <a:t>0,78</a:t>
             </a:r>
           </a:p>
         </p:txBody>
@@ -3739,7 +3739,7 @@
             <a:pPr algn="ctr"/>
             <a:r>
               <a:rPr lang="en-GB" sz="2000" dirty="0"/>
-              <a:t>0.787</a:t>
+              <a:t>0,787</a:t>
             </a:r>
           </a:p>
         </p:txBody>
@@ -3778,7 +3778,7 @@
             <a:pPr algn="ctr"/>
             <a:r>
               <a:rPr lang="en-GB" sz="2000" dirty="0"/>
-              <a:t>0.877</a:t>
+              <a:t>0,877</a:t>
             </a:r>
           </a:p>
         </p:txBody>
@@ -3817,7 +3817,7 @@
             <a:pPr algn="ctr"/>
             <a:r>
               <a:rPr lang="en-GB" sz="2000" dirty="0"/>
-              <a:t>0.778</a:t>
+              <a:t>0,778</a:t>
             </a:r>
           </a:p>
         </p:txBody>
@@ -3932,7 +3932,7 @@
             <a:pPr algn="ctr"/>
             <a:r>
               <a:rPr lang="en-GB" sz="2000" dirty="0"/>
-              <a:t>0.5</a:t>
+              <a:t>0,5</a:t>
             </a:r>
           </a:p>
         </p:txBody>
@@ -3968,7 +3968,7 @@
             <a:pPr algn="ctr"/>
             <a:r>
               <a:rPr lang="en-GB" sz="2000" dirty="0"/>
-              <a:t>0.5</a:t>
+              <a:t>0,5</a:t>
             </a:r>
           </a:p>
         </p:txBody>
@@ -4158,7 +4158,7 @@
             <a:pPr algn="ctr"/>
             <a:r>
               <a:rPr lang="en-GB" sz="2000" dirty="0"/>
-              <a:t>0.676</a:t>
+              <a:t>0,676</a:t>
             </a:r>
           </a:p>
         </p:txBody>
@@ -4194,7 +4194,7 @@
             <a:pPr algn="ctr"/>
             <a:r>
               <a:rPr lang="en-GB" sz="2000" dirty="0"/>
-              <a:t>0.67</a:t>
+              <a:t>0,67</a:t>
             </a:r>
           </a:p>
         </p:txBody>
@@ -4352,7 +4352,7 @@
             <a:pPr algn="ctr"/>
             <a:r>
               <a:rPr lang="en-GB" sz="2000" dirty="0"/>
-              <a:t>0.677</a:t>
+              <a:t>0,677</a:t>
             </a:r>
           </a:p>
         </p:txBody>
@@ -4388,7 +4388,7 @@
             <a:pPr algn="ctr"/>
             <a:r>
               <a:rPr lang="en-GB" sz="2000" dirty="0"/>
-              <a:t>0.67</a:t>
+              <a:t>0,67</a:t>
             </a:r>
           </a:p>
         </p:txBody>
@@ -4821,7 +4821,7 @@
             <a:pPr algn="ctr"/>
             <a:r>
               <a:rPr lang="en-GB" sz="2000" dirty="0"/>
-              <a:t>0.3</a:t>
+              <a:t>0,3</a:t>
             </a:r>
           </a:p>
         </p:txBody>
@@ -4857,7 +4857,7 @@
             <a:pPr algn="ctr"/>
             <a:r>
               <a:rPr lang="en-GB" sz="2000" dirty="0"/>
-              <a:t>0.42</a:t>
+              <a:t>0,42</a:t>
             </a:r>
           </a:p>
         </p:txBody>
@@ -4893,7 +4893,7 @@
             <a:pPr algn="ctr"/>
             <a:r>
               <a:rPr lang="en-GB" sz="2000" dirty="0"/>
-              <a:t>0.2</a:t>
+              <a:t>0,2</a:t>
             </a:r>
           </a:p>
         </p:txBody>
@@ -4929,7 +4929,7 @@
             <a:pPr algn="ctr"/>
             <a:r>
               <a:rPr lang="en-GB" sz="2000" dirty="0"/>
-              <a:t>0.658</a:t>
+              <a:t>0,658</a:t>
             </a:r>
           </a:p>
         </p:txBody>
@@ -4972,7 +4972,7 @@
             <a:pPr algn="ctr"/>
             <a:r>
               <a:rPr lang="en-GB" sz="2000" dirty="0"/>
-              <a:t>0.34</a:t>
+              <a:t>0,34</a:t>
             </a:r>
           </a:p>
         </p:txBody>
@@ -5015,7 +5015,7 @@
             <a:pPr algn="ctr"/>
             <a:r>
               <a:rPr lang="en-GB" sz="2000" dirty="0"/>
-              <a:t>0.41</a:t>
+              <a:t>0,41</a:t>
             </a:r>
           </a:p>
         </p:txBody>
@@ -5058,7 +5058,7 @@
             <a:pPr algn="ctr"/>
             <a:r>
               <a:rPr lang="en-GB" sz="2000" dirty="0"/>
-              <a:t>0.4</a:t>
+              <a:t>0,4</a:t>
             </a:r>
           </a:p>
         </p:txBody>
@@ -5101,7 +5101,7 @@
             <a:pPr algn="ctr"/>
             <a:r>
               <a:rPr lang="en-GB" sz="2000" dirty="0"/>
-              <a:t>0.403</a:t>
+              <a:t>0,403</a:t>
             </a:r>
           </a:p>
         </p:txBody>
@@ -5404,7 +5404,7 @@
             <a:pPr algn="r"/>
             <a:r>
               <a:rPr lang="en-GB" sz="2000" dirty="0"/>
-              <a:t>0.23</a:t>
+              <a:t>0,23</a:t>
             </a:r>
           </a:p>
         </p:txBody>
@@ -5447,7 +5447,7 @@
             <a:pPr algn="r"/>
             <a:r>
               <a:rPr lang="en-GB" sz="2000" dirty="0"/>
-              <a:t>0.65</a:t>
+              <a:t>0,65</a:t>
             </a:r>
           </a:p>
         </p:txBody>
@@ -5490,7 +5490,7 @@
             <a:pPr algn="r"/>
             <a:r>
               <a:rPr lang="en-GB" sz="2000" dirty="0"/>
-              <a:t>0.56</a:t>
+              <a:t>0,56</a:t>
             </a:r>
           </a:p>
         </p:txBody>
@@ -5533,7 +5533,7 @@
             <a:pPr algn="r"/>
             <a:r>
               <a:rPr lang="en-GB" sz="2000" dirty="0"/>
-              <a:t>0.506</a:t>
+              <a:t>0,506</a:t>
             </a:r>
           </a:p>
         </p:txBody>
@@ -5576,7 +5576,7 @@
             <a:pPr algn="r"/>
             <a:r>
               <a:rPr lang="en-GB" sz="2000" dirty="0"/>
-              <a:t>0.32</a:t>
+              <a:t>0,32</a:t>
             </a:r>
           </a:p>
         </p:txBody>
@@ -5619,7 +5619,7 @@
             <a:pPr algn="r"/>
             <a:r>
               <a:rPr lang="en-GB" sz="2000" dirty="0"/>
-              <a:t>0.203</a:t>
+              <a:t>0,203</a:t>
             </a:r>
           </a:p>
         </p:txBody>
@@ -5662,7 +5662,7 @@
             <a:pPr algn="r"/>
             <a:r>
               <a:rPr lang="en-GB" sz="2000" dirty="0"/>
-              <a:t>0.3</a:t>
+              <a:t>0,3</a:t>
             </a:r>
           </a:p>
         </p:txBody>
@@ -5705,7 +5705,7 @@
             <a:pPr algn="ctr"/>
             <a:r>
               <a:rPr lang="en-GB" sz="2000" dirty="0"/>
-              <a:t>4.5</a:t>
+              <a:t>4,5</a:t>
             </a:r>
             <a:r>
               <a:rPr lang="ky-KG" sz="2000" dirty="0"/>
@@ -5713,7 +5713,7 @@
             </a:r>
             <a:r>
               <a:rPr lang="en-GB" sz="2000" dirty="0"/>
-              <a:t>&lt;0.454 </a:t>
+              <a:t>&lt;0,454 </a:t>
             </a:r>
             <a:r>
               <a:rPr lang="ky-KG" sz="2000" dirty="0"/>
@@ -5721,7 +5721,7 @@
             </a:r>
             <a:r>
               <a:rPr lang="en-GB" sz="2000" dirty="0"/>
-              <a:t>&lt;0.5 </a:t>
+              <a:t>&lt;0,5 </a:t>
             </a:r>
             <a:r>
               <a:rPr lang="ky-KG" sz="2000" dirty="0"/>
@@ -5733,7 +5733,7 @@
             <a:pPr algn="ctr"/>
             <a:r>
               <a:rPr lang="en-GB" sz="2000" dirty="0"/>
-              <a:t>&lt;0.54 </a:t>
+              <a:t>&lt;0,54 </a:t>
             </a:r>
             <a:r>
               <a:rPr lang="ky-KG" sz="2000" dirty="0"/>
@@ -5741,7 +5741,7 @@
             </a:r>
             <a:r>
               <a:rPr lang="en-GB" sz="2000" dirty="0"/>
-              <a:t>&lt;5.45 </a:t>
+              <a:t>&lt;5,45 </a:t>
             </a:r>
             <a:r>
               <a:rPr lang="ky-KG" sz="2000" dirty="0"/>
@@ -5789,14 +5789,14 @@
             <a:pPr algn="ctr"/>
             <a:r>
               <a:rPr lang="en-GB" sz="2000" dirty="0"/>
-              <a:t>0.778 &lt; 0.78 &lt; 0.787</a:t>
+              <a:t>0,778 &lt; 0,78 &lt; 0,787</a:t>
             </a:r>
           </a:p>
           <a:p>
             <a:pPr algn="ctr"/>
             <a:r>
               <a:rPr lang="en-GB" sz="2000" dirty="0"/>
-              <a:t>&lt; 0.807 &lt; 0.87 &lt; 0.877</a:t>
+              <a:t>&lt; 0,807 &lt; 0,87 &lt; 0,877</a:t>
             </a:r>
           </a:p>
         </p:txBody>
@@ -5832,7 +5832,7 @@
             <a:pPr algn="ctr"/>
             <a:r>
               <a:rPr lang="en-GB" sz="2000" dirty="0"/>
-              <a:t>0.5</a:t>
+              <a:t>0,5</a:t>
             </a:r>
           </a:p>
         </p:txBody>
@@ -6021,7 +6021,7 @@
               <a:pPr algn="ctr"/>
               <a:r>
                 <a:rPr lang="en-GB" sz="2000" dirty="0"/>
-                <a:t>0.676 &lt; 0.67 &lt; 0.677&lt;0.67</a:t>
+                <a:t>0,676 &lt; 0,67 &lt; 0,677&lt;0,67</a:t>
               </a:r>
             </a:p>
           </p:txBody>
@@ -6503,7 +6503,7 @@
             <a:pPr algn="ctr"/>
             <a:r>
               <a:rPr lang="en-GB" sz="2000" dirty="0"/>
-              <a:t>0.3</a:t>
+              <a:t>0,3</a:t>
             </a:r>
           </a:p>
         </p:txBody>
@@ -6576,7 +6576,7 @@
             <a:pPr algn="ctr"/>
             <a:r>
               <a:rPr lang="en-GB" sz="2000" dirty="0"/>
-              <a:t>0.03</a:t>
+              <a:t>0,03</a:t>
             </a:r>
           </a:p>
         </p:txBody>
@@ -6689,7 +6689,7 @@
             <a:pPr algn="ctr"/>
             <a:r>
               <a:rPr lang="en-GB" sz="2000" dirty="0"/>
-              <a:t>0.38</a:t>
+              <a:t>0,38</a:t>
             </a:r>
           </a:p>
         </p:txBody>
@@ -6762,7 +6762,7 @@
             <a:pPr algn="ctr"/>
             <a:r>
               <a:rPr lang="en-GB" sz="2000" dirty="0"/>
-              <a:t>0.42</a:t>
+              <a:t>0,42</a:t>
             </a:r>
           </a:p>
         </p:txBody>
@@ -6875,7 +6875,7 @@
             <a:pPr algn="ctr"/>
             <a:r>
               <a:rPr lang="en-GB" sz="2000" dirty="0"/>
-              <a:t>0.2</a:t>
+              <a:t>0,2</a:t>
             </a:r>
           </a:p>
         </p:txBody>
@@ -6948,7 +6948,7 @@
             <a:pPr algn="ctr"/>
             <a:r>
               <a:rPr lang="en-GB" sz="2000" dirty="0"/>
-              <a:t>0.18</a:t>
+              <a:t>0,18</a:t>
             </a:r>
           </a:p>
         </p:txBody>
@@ -7061,7 +7061,7 @@
             <a:pPr algn="ctr"/>
             <a:r>
               <a:rPr lang="en-GB" sz="2000" dirty="0"/>
-              <a:t>0.658</a:t>
+              <a:t>0,658</a:t>
             </a:r>
           </a:p>
         </p:txBody>
@@ -7134,7 +7134,7 @@
             <a:pPr algn="ctr"/>
             <a:r>
               <a:rPr lang="en-GB" sz="2000" dirty="0"/>
-              <a:t>0.65</a:t>
+              <a:t>0,65</a:t>
             </a:r>
           </a:p>
         </p:txBody>
@@ -7260,7 +7260,7 @@
             <a:pPr algn="ctr"/>
             <a:r>
               <a:rPr lang="en-GB" sz="2000" dirty="0"/>
-              <a:t>0.34</a:t>
+              <a:t>0,34</a:t>
             </a:r>
           </a:p>
         </p:txBody>
@@ -7299,7 +7299,7 @@
             <a:pPr algn="ctr"/>
             <a:r>
               <a:rPr lang="en-GB" sz="2000" dirty="0"/>
-              <a:t>0.4</a:t>
+              <a:t>0,4</a:t>
             </a:r>
           </a:p>
         </p:txBody>
@@ -7338,7 +7338,7 @@
             <a:pPr algn="ctr"/>
             <a:r>
               <a:rPr lang="en-GB" sz="2000" dirty="0"/>
-              <a:t>0.41</a:t>
+              <a:t>0,41</a:t>
             </a:r>
           </a:p>
         </p:txBody>
@@ -7377,7 +7377,7 @@
             <a:pPr algn="ctr"/>
             <a:r>
               <a:rPr lang="en-GB" sz="2000" dirty="0"/>
-              <a:t>0.403</a:t>
+              <a:t>0,403</a:t>
             </a:r>
           </a:p>
         </p:txBody>
@@ -7499,7 +7499,7 @@
             <a:pPr algn="ctr"/>
             <a:r>
               <a:rPr lang="en-GB" sz="2000" dirty="0"/>
-              <a:t>0.23</a:t>
+              <a:t>0,23</a:t>
             </a:r>
           </a:p>
         </p:txBody>
@@ -7535,7 +7535,7 @@
             <a:pPr algn="ctr"/>
             <a:r>
               <a:rPr lang="en-GB" sz="2000" dirty="0"/>
-              <a:t>0.3</a:t>
+              <a:t>0,3</a:t>
             </a:r>
           </a:p>
         </p:txBody>
@@ -7571,7 +7571,7 @@
             <a:pPr algn="ctr"/>
             <a:r>
               <a:rPr lang="en-GB" sz="2000" dirty="0"/>
-              <a:t>0.203</a:t>
+              <a:t>0,203</a:t>
             </a:r>
           </a:p>
         </p:txBody>
@@ -7693,7 +7693,7 @@
             <a:pPr algn="ctr"/>
             <a:r>
               <a:rPr lang="en-GB" sz="2000" dirty="0"/>
-              <a:t>0.506</a:t>
+              <a:t>0,506</a:t>
             </a:r>
           </a:p>
         </p:txBody>
@@ -7729,7 +7729,7 @@
             <a:pPr algn="ctr"/>
             <a:r>
               <a:rPr lang="en-GB" sz="2000" dirty="0"/>
-              <a:t>0.65</a:t>
+              <a:t>0,65</a:t>
             </a:r>
           </a:p>
         </p:txBody>
@@ -7765,7 +7765,7 @@
             <a:pPr algn="ctr"/>
             <a:r>
               <a:rPr lang="en-GB" sz="2000" dirty="0"/>
-              <a:t>0.56</a:t>
+              <a:t>0,56</a:t>
             </a:r>
           </a:p>
         </p:txBody>
@@ -7801,7 +7801,7 @@
             <a:pPr algn="ctr"/>
             <a:r>
               <a:rPr lang="en-GB" sz="2000" dirty="0"/>
-              <a:t>0.32</a:t>
+              <a:t>0,32</a:t>
             </a:r>
           </a:p>
         </p:txBody>
@@ -7971,7 +7971,7 @@
             <a:pPr algn="ctr"/>
             <a:r>
               <a:rPr lang="en-GB" sz="2000" dirty="0"/>
-              <a:t>0.5 </a:t>
+              <a:t>0,5 </a:t>
             </a:r>
             <a:r>
               <a:rPr lang="ky-KG" sz="2000" dirty="0"/>
@@ -8012,7 +8012,7 @@
             <a:pPr algn="ctr"/>
             <a:r>
               <a:rPr lang="en-GB" sz="2000" dirty="0"/>
-              <a:t>4.5 </a:t>
+              <a:t>4,5 </a:t>
             </a:r>
             <a:r>
               <a:rPr lang="ky-KG" sz="2000" dirty="0"/>
@@ -8053,7 +8053,7 @@
             <a:pPr algn="ctr"/>
             <a:r>
               <a:rPr lang="en-GB" sz="2000" dirty="0"/>
-              <a:t>5.45 </a:t>
+              <a:t>5,45 </a:t>
             </a:r>
             <a:r>
               <a:rPr lang="ky-KG" sz="2000" dirty="0"/>
@@ -8094,7 +8094,7 @@
             <a:pPr algn="ctr"/>
             <a:r>
               <a:rPr lang="en-GB" sz="2000" dirty="0"/>
-              <a:t>0.54 </a:t>
+              <a:t>0,54 </a:t>
             </a:r>
             <a:r>
               <a:rPr lang="ky-KG" sz="2000" dirty="0"/>
@@ -8135,7 +8135,7 @@
             <a:pPr algn="ctr"/>
             <a:r>
               <a:rPr lang="en-GB" sz="2000" dirty="0"/>
-              <a:t>0.454 </a:t>
+              <a:t>0,454 </a:t>
             </a:r>
             <a:r>
               <a:rPr lang="ky-KG" sz="2000" dirty="0"/>
@@ -8316,7 +8316,7 @@
             <a:pPr algn="ctr"/>
             <a:r>
               <a:rPr lang="en-GB" sz="2000" dirty="0"/>
-              <a:t>0.87</a:t>
+              <a:t>0,87</a:t>
             </a:r>
           </a:p>
         </p:txBody>
@@ -8355,7 +8355,7 @@
             <a:pPr algn="ctr"/>
             <a:r>
               <a:rPr lang="en-GB" sz="2000" dirty="0"/>
-              <a:t>0.807</a:t>
+              <a:t>0,807</a:t>
             </a:r>
           </a:p>
         </p:txBody>
@@ -8394,7 +8394,7 @@
             <a:pPr algn="ctr"/>
             <a:r>
               <a:rPr lang="en-GB" sz="2000" dirty="0"/>
-              <a:t>0.78</a:t>
+              <a:t>0,78</a:t>
             </a:r>
           </a:p>
         </p:txBody>
@@ -8433,7 +8433,7 @@
             <a:pPr algn="ctr"/>
             <a:r>
               <a:rPr lang="en-GB" sz="2000" dirty="0"/>
-              <a:t>0.787</a:t>
+              <a:t>0,787</a:t>
             </a:r>
           </a:p>
         </p:txBody>
@@ -8472,7 +8472,7 @@
             <a:pPr algn="ctr"/>
             <a:r>
               <a:rPr lang="en-GB" sz="2000" dirty="0"/>
-              <a:t>0.877</a:t>
+              <a:t>0,877</a:t>
             </a:r>
           </a:p>
         </p:txBody>
@@ -8511,7 +8511,7 @@
             <a:pPr algn="ctr"/>
             <a:r>
               <a:rPr lang="en-GB" sz="2000" dirty="0"/>
-              <a:t>0.778</a:t>
+              <a:t>0,778</a:t>
             </a:r>
           </a:p>
         </p:txBody>
@@ -8626,7 +8626,7 @@
             <a:pPr algn="ctr"/>
             <a:r>
               <a:rPr lang="en-GB" sz="2000" dirty="0"/>
-              <a:t>0.5</a:t>
+              <a:t>0,5</a:t>
             </a:r>
           </a:p>
         </p:txBody>
@@ -8662,7 +8662,7 @@
             <a:pPr algn="ctr"/>
             <a:r>
               <a:rPr lang="en-GB" sz="2000" dirty="0"/>
-              <a:t>0.5</a:t>
+              <a:t>0,5</a:t>
             </a:r>
           </a:p>
         </p:txBody>
@@ -8852,7 +8852,7 @@
             <a:pPr algn="ctr"/>
             <a:r>
               <a:rPr lang="en-GB" sz="2000" dirty="0"/>
-              <a:t>0.676</a:t>
+              <a:t>0,676</a:t>
             </a:r>
           </a:p>
         </p:txBody>
@@ -8888,7 +8888,7 @@
             <a:pPr algn="ctr"/>
             <a:r>
               <a:rPr lang="en-GB" sz="2000" dirty="0"/>
-              <a:t>0.67</a:t>
+              <a:t>0,67</a:t>
             </a:r>
           </a:p>
         </p:txBody>
@@ -9046,7 +9046,7 @@
             <a:pPr algn="ctr"/>
             <a:r>
               <a:rPr lang="en-GB" sz="2000" dirty="0"/>
-              <a:t>0.677</a:t>
+              <a:t>0,677</a:t>
             </a:r>
           </a:p>
         </p:txBody>
@@ -9082,7 +9082,7 @@
             <a:pPr algn="ctr"/>
             <a:r>
               <a:rPr lang="en-GB" sz="2000" dirty="0"/>
-              <a:t>0.67</a:t>
+              <a:t>0,67</a:t>
             </a:r>
           </a:p>
         </p:txBody>
